--- a/content/Lectures/Semester 1/Week 02 - Linear Programming 1/5 Source Files/Week 2 - Linear Programming 1.pptx
+++ b/content/Lectures/Semester 1/Week 02 - Linear Programming 1/5 Source Files/Week 2 - Linear Programming 1.pptx
@@ -5021,7 +5021,7 @@
                         <a:rPr lang="en-GB" b="0" i="1" smtClean="0">
                           <a:latin typeface="Cambria Math" panose="02040503050406030204" pitchFamily="18" charset="0"/>
                         </a:rPr>
-                        <m:t>=£277.72</m:t>
+                        <m:t>=£277.71</m:t>
                       </m:r>
                     </m:oMath>
                   </m:oMathPara>
@@ -8040,7 +8040,7 @@
                           </a:solidFill>
                           <a:latin typeface="Cambria Math" panose="02040503050406030204" pitchFamily="18" charset="0"/>
                         </a:rPr>
-                        <m:t>=4⋅10.29</m:t>
+                        <m:t>≈4⋅10.29</m:t>
                       </m:r>
                     </m:oMath>
                   </m:oMathPara>
@@ -10569,7 +10569,7 @@
                 </a14:m>
                 <a:r>
                   <a:rPr lang="en-GB" b="0" dirty="0"/>
-                  <a:t>. Thus </a:t>
+                  <a:t> from (0, 72) to (48, 0). Thus </a:t>
                 </a:r>
                 <a14:m>
                   <m:oMath xmlns:m="http://schemas.openxmlformats.org/officeDocument/2006/math">
@@ -11613,7 +11613,7 @@
             </a:pPr>
             <a:r>
               <a:rPr lang="en-GB" dirty="0"/>
-              <a:t>Optimal solution always contained at a boundary, however may lie on the boundary</a:t>
+              <a:t>An optimal solution always lies on the boundary of the feasible region: at a vertex, or along a whole edge (infinitely many solutions).</a:t>
             </a:r>
           </a:p>
           <a:p>
@@ -11628,7 +11628,7 @@
             </a:pPr>
             <a:r>
               <a:rPr lang="en-GB" dirty="0"/>
-              <a:t>Optimal solution always exists at a vertex, these are known as </a:t>
+              <a:t>If an optimal solution exists, one is always at a vertex. The vertices are known as </a:t>
             </a:r>
             <a:r>
               <a:rPr lang="en-GB" u="sng" dirty="0"/>
@@ -18842,7 +18842,7 @@
           <a:p>
             <a:r>
               <a:rPr lang="en-GB" dirty="0"/>
-              <a:t>maximum and minimum equivalence</a:t>
+              <a:t>Maximum and minimum equivalence</a:t>
             </a:r>
           </a:p>
         </p:txBody>
@@ -20245,7 +20245,7 @@
               <a:rPr lang="en-GB" dirty="0">
                 <a:hlinkClick r:id="rId3"/>
               </a:rPr>
-              <a:t> — SciPy v1.11.3 Manual</a:t>
+              <a:t> — SciPy documentation</a:t>
             </a:r>
             <a:endParaRPr lang="en-GB" dirty="0"/>
           </a:p>
@@ -20450,7 +20450,7 @@
             </a:pPr>
             <a:r>
               <a:rPr lang="en-GB" dirty="0"/>
-              <a:t>We will use a friendlier way to express this next week, however it important to:</a:t>
+              <a:t>We will use a friendlier way to express this next week, however it is important to:</a:t>
             </a:r>
           </a:p>
           <a:p>

--- a/content/Lectures/Semester 1/Week 02 - Linear Programming 1/5 Source Files/Week 2 - Linear Programming 1.pptx
+++ b/content/Lectures/Semester 1/Week 02 - Linear Programming 1/5 Source Files/Week 2 - Linear Programming 1.pptx
@@ -4378,7 +4378,7 @@
                 </a:pPr>
                 <a:r>
                   <a:rPr lang="en-GB" dirty="0"/>
-                  <a:t>For example, Should the number of </a:t>
+                  <a:t>For example, should the number of </a:t>
                 </a:r>
                 <a14:m>
                   <m:oMath xmlns:m="http://schemas.openxmlformats.org/officeDocument/2006/math">
@@ -4896,7 +4896,7 @@
                 </a:pPr>
                 <a:r>
                   <a:rPr lang="en-GB" dirty="0"/>
-                  <a:t>i.e. make enough tables to go with chairs</a:t>
+                  <a:t>i.e. make at least 4 chairs for each table</a:t>
                 </a:r>
               </a:p>
               <a:p>

--- a/content/Lectures/Semester 1/Week 02 - Linear Programming 1/5 Source Files/Week 2 - Linear Programming 1.pptx
+++ b/content/Lectures/Semester 1/Week 02 - Linear Programming 1/5 Source Files/Week 2 - Linear Programming 1.pptx
@@ -154,6 +154,38 @@
 
 <file path=ppt/changesInfos/changesInfo1.xml><?xml version="1.0" encoding="utf-8"?>
 <pc:chgInfo xmlns:a="http://schemas.openxmlformats.org/drawingml/2006/main" xmlns:r="http://schemas.openxmlformats.org/officeDocument/2006/relationships" xmlns:ac="http://schemas.microsoft.com/office/drawing/2013/main/command" xmlns:pc="http://schemas.microsoft.com/office/powerpoint/2013/main/command">
+  <pc:docChgLst>
+    <pc:chgData name="Sam O'Neill" userId="cb323814-a42a-4cfe-bc74-03f595e56f6e" providerId="ADAL" clId="{FC573C1E-5364-4385-B41B-4E798FCD684A}"/>
+    <pc:docChg chg="custSel modSld">
+      <pc:chgData name="Sam O'Neill" userId="cb323814-a42a-4cfe-bc74-03f595e56f6e" providerId="ADAL" clId="{FC573C1E-5364-4385-B41B-4E798FCD684A}" dt="2023-10-02T09:01:02.828" v="6" actId="14100"/>
+      <pc:docMkLst>
+        <pc:docMk/>
+      </pc:docMkLst>
+      <pc:sldChg chg="addSp delSp modSp mod">
+        <pc:chgData name="Sam O'Neill" userId="cb323814-a42a-4cfe-bc74-03f595e56f6e" providerId="ADAL" clId="{FC573C1E-5364-4385-B41B-4E798FCD684A}" dt="2023-10-02T09:01:02.828" v="6" actId="14100"/>
+        <pc:sldMkLst>
+          <pc:docMk/>
+          <pc:sldMk cId="2837434748" sldId="281"/>
+        </pc:sldMkLst>
+      </pc:sldChg>
+    </pc:docChg>
+  </pc:docChgLst>
+  <pc:docChgLst>
+    <pc:chgData name="Sam O'Neill" userId="cb323814-a42a-4cfe-bc74-03f595e56f6e" providerId="ADAL" clId="{FE101BF0-67F3-4B44-8042-2748916B529A}"/>
+    <pc:docChg chg="custSel modSld">
+      <pc:chgData name="Sam O'Neill" userId="cb323814-a42a-4cfe-bc74-03f595e56f6e" providerId="ADAL" clId="{FE101BF0-67F3-4B44-8042-2748916B529A}" dt="2023-10-02T10:53:03.337" v="4" actId="1076"/>
+      <pc:docMkLst>
+        <pc:docMk/>
+      </pc:docMkLst>
+      <pc:sldChg chg="addSp delSp modSp mod">
+        <pc:chgData name="Sam O'Neill" userId="cb323814-a42a-4cfe-bc74-03f595e56f6e" providerId="ADAL" clId="{FE101BF0-67F3-4B44-8042-2748916B529A}" dt="2023-10-02T10:53:03.337" v="4" actId="1076"/>
+        <pc:sldMkLst>
+          <pc:docMk/>
+          <pc:sldMk cId="2837434748" sldId="281"/>
+        </pc:sldMkLst>
+      </pc:sldChg>
+    </pc:docChg>
+  </pc:docChgLst>
   <pc:docChgLst>
     <pc:chgData name="Sam O'Neill" userId="cb323814-a42a-4cfe-bc74-03f595e56f6e" providerId="ADAL" clId="{E5DEC410-C6B0-4C99-8A50-0FAAAFFEC6E4}"/>
     <pc:docChg chg="undo custSel modSld modMainMaster">
@@ -452,38 +484,6 @@
       </pc:sldMasterChg>
     </pc:docChg>
   </pc:docChgLst>
-  <pc:docChgLst>
-    <pc:chgData name="Sam O'Neill" userId="cb323814-a42a-4cfe-bc74-03f595e56f6e" providerId="ADAL" clId="{FE101BF0-67F3-4B44-8042-2748916B529A}"/>
-    <pc:docChg chg="custSel modSld">
-      <pc:chgData name="Sam O'Neill" userId="cb323814-a42a-4cfe-bc74-03f595e56f6e" providerId="ADAL" clId="{FE101BF0-67F3-4B44-8042-2748916B529A}" dt="2023-10-02T10:53:03.337" v="4" actId="1076"/>
-      <pc:docMkLst>
-        <pc:docMk/>
-      </pc:docMkLst>
-      <pc:sldChg chg="addSp delSp modSp mod">
-        <pc:chgData name="Sam O'Neill" userId="cb323814-a42a-4cfe-bc74-03f595e56f6e" providerId="ADAL" clId="{FE101BF0-67F3-4B44-8042-2748916B529A}" dt="2023-10-02T10:53:03.337" v="4" actId="1076"/>
-        <pc:sldMkLst>
-          <pc:docMk/>
-          <pc:sldMk cId="2837434748" sldId="281"/>
-        </pc:sldMkLst>
-      </pc:sldChg>
-    </pc:docChg>
-  </pc:docChgLst>
-  <pc:docChgLst>
-    <pc:chgData name="Sam O'Neill" userId="cb323814-a42a-4cfe-bc74-03f595e56f6e" providerId="ADAL" clId="{FC573C1E-5364-4385-B41B-4E798FCD684A}"/>
-    <pc:docChg chg="custSel modSld">
-      <pc:chgData name="Sam O'Neill" userId="cb323814-a42a-4cfe-bc74-03f595e56f6e" providerId="ADAL" clId="{FC573C1E-5364-4385-B41B-4E798FCD684A}" dt="2023-10-02T09:01:02.828" v="6" actId="14100"/>
-      <pc:docMkLst>
-        <pc:docMk/>
-      </pc:docMkLst>
-      <pc:sldChg chg="addSp delSp modSp mod">
-        <pc:chgData name="Sam O'Neill" userId="cb323814-a42a-4cfe-bc74-03f595e56f6e" providerId="ADAL" clId="{FC573C1E-5364-4385-B41B-4E798FCD684A}" dt="2023-10-02T09:01:02.828" v="6" actId="14100"/>
-        <pc:sldMkLst>
-          <pc:docMk/>
-          <pc:sldMk cId="2837434748" sldId="281"/>
-        </pc:sldMkLst>
-      </pc:sldChg>
-    </pc:docChg>
-  </pc:docChgLst>
 </pc:chgInfo>
 </file>
 
@@ -636,7 +636,7 @@
           <a:p>
             <a:fld id="{56A039F1-953F-4A39-846E-4A181A4AE2B1}" type="datetimeFigureOut">
               <a:rPr lang="en-GB" smtClean="0"/>
-              <a:t>01/10/2025</a:t>
+              <a:t>17/10/2026</a:t>
             </a:fld>
             <a:endParaRPr lang="en-GB"/>
           </a:p>
@@ -836,7 +836,7 @@
           <a:p>
             <a:fld id="{56A039F1-953F-4A39-846E-4A181A4AE2B1}" type="datetimeFigureOut">
               <a:rPr lang="en-GB" smtClean="0"/>
-              <a:t>01/10/2025</a:t>
+              <a:t>17/10/2026</a:t>
             </a:fld>
             <a:endParaRPr lang="en-GB"/>
           </a:p>
@@ -1046,7 +1046,7 @@
           <a:p>
             <a:fld id="{56A039F1-953F-4A39-846E-4A181A4AE2B1}" type="datetimeFigureOut">
               <a:rPr lang="en-GB" smtClean="0"/>
-              <a:t>01/10/2025</a:t>
+              <a:t>17/10/2026</a:t>
             </a:fld>
             <a:endParaRPr lang="en-GB"/>
           </a:p>
@@ -1246,7 +1246,7 @@
           <a:p>
             <a:fld id="{56A039F1-953F-4A39-846E-4A181A4AE2B1}" type="datetimeFigureOut">
               <a:rPr lang="en-GB" smtClean="0"/>
-              <a:t>01/10/2025</a:t>
+              <a:t>17/10/2026</a:t>
             </a:fld>
             <a:endParaRPr lang="en-GB"/>
           </a:p>
@@ -1522,7 +1522,7 @@
           <a:p>
             <a:fld id="{56A039F1-953F-4A39-846E-4A181A4AE2B1}" type="datetimeFigureOut">
               <a:rPr lang="en-GB" smtClean="0"/>
-              <a:t>01/10/2025</a:t>
+              <a:t>17/10/2026</a:t>
             </a:fld>
             <a:endParaRPr lang="en-GB"/>
           </a:p>
@@ -1790,7 +1790,7 @@
           <a:p>
             <a:fld id="{56A039F1-953F-4A39-846E-4A181A4AE2B1}" type="datetimeFigureOut">
               <a:rPr lang="en-GB" smtClean="0"/>
-              <a:t>01/10/2025</a:t>
+              <a:t>17/10/2026</a:t>
             </a:fld>
             <a:endParaRPr lang="en-GB"/>
           </a:p>
@@ -2205,7 +2205,7 @@
           <a:p>
             <a:fld id="{56A039F1-953F-4A39-846E-4A181A4AE2B1}" type="datetimeFigureOut">
               <a:rPr lang="en-GB" smtClean="0"/>
-              <a:t>01/10/2025</a:t>
+              <a:t>17/10/2026</a:t>
             </a:fld>
             <a:endParaRPr lang="en-GB"/>
           </a:p>
@@ -2347,7 +2347,7 @@
           <a:p>
             <a:fld id="{56A039F1-953F-4A39-846E-4A181A4AE2B1}" type="datetimeFigureOut">
               <a:rPr lang="en-GB" smtClean="0"/>
-              <a:t>01/10/2025</a:t>
+              <a:t>17/10/2026</a:t>
             </a:fld>
             <a:endParaRPr lang="en-GB"/>
           </a:p>
@@ -2460,7 +2460,7 @@
           <a:p>
             <a:fld id="{56A039F1-953F-4A39-846E-4A181A4AE2B1}" type="datetimeFigureOut">
               <a:rPr lang="en-GB" smtClean="0"/>
-              <a:t>01/10/2025</a:t>
+              <a:t>17/10/2026</a:t>
             </a:fld>
             <a:endParaRPr lang="en-GB"/>
           </a:p>
@@ -2773,7 +2773,7 @@
           <a:p>
             <a:fld id="{56A039F1-953F-4A39-846E-4A181A4AE2B1}" type="datetimeFigureOut">
               <a:rPr lang="en-GB" smtClean="0"/>
-              <a:t>01/10/2025</a:t>
+              <a:t>17/10/2026</a:t>
             </a:fld>
             <a:endParaRPr lang="en-GB"/>
           </a:p>
@@ -3062,7 +3062,7 @@
           <a:p>
             <a:fld id="{56A039F1-953F-4A39-846E-4A181A4AE2B1}" type="datetimeFigureOut">
               <a:rPr lang="en-GB" smtClean="0"/>
-              <a:t>01/10/2025</a:t>
+              <a:t>17/10/2026</a:t>
             </a:fld>
             <a:endParaRPr lang="en-GB"/>
           </a:p>
@@ -3305,7 +3305,7 @@
           <a:p>
             <a:fld id="{56A039F1-953F-4A39-846E-4A181A4AE2B1}" type="datetimeFigureOut">
               <a:rPr lang="en-GB" smtClean="0"/>
-              <a:t>01/10/2025</a:t>
+              <a:t>17/10/2026</a:t>
             </a:fld>
             <a:endParaRPr lang="en-GB"/>
           </a:p>
@@ -4794,8 +4794,8 @@
           </a:p>
         </p:txBody>
       </p:sp>
-      <mc:AlternateContent xmlns:mc="http://schemas.openxmlformats.org/markup-compatibility/2006">
-        <mc:Choice xmlns:a14="http://schemas.microsoft.com/office/drawing/2010/main" Requires="a14">
+      <mc:AlternateContent xmlns:mc="http://schemas.openxmlformats.org/markup-compatibility/2006" xmlns:a14="http://schemas.microsoft.com/office/drawing/2010/main">
+        <mc:Choice Requires="a14">
           <p:sp>
             <p:nvSpPr>
               <p:cNvPr id="3" name="Content Placeholder 2">
@@ -5052,7 +5052,7 @@
             </p:txBody>
           </p:sp>
         </mc:Choice>
-        <mc:Fallback>
+        <mc:Fallback xmlns="">
           <p:sp>
             <p:nvSpPr>
               <p:cNvPr id="3" name="Content Placeholder 2">
@@ -5118,7 +5118,7 @@
         </p:blipFill>
         <p:spPr>
           <a:xfrm>
-            <a:off x="6441600" y="1071418"/>
+            <a:off x="6412103" y="1071418"/>
             <a:ext cx="5191125" cy="5219700"/>
           </a:xfrm>
           <a:prstGeom prst="rect">
@@ -8685,8 +8685,8 @@
           </a:p>
         </p:txBody>
       </p:sp>
-      <mc:AlternateContent xmlns:mc="http://schemas.openxmlformats.org/markup-compatibility/2006">
-        <mc:Choice xmlns:a14="http://schemas.microsoft.com/office/drawing/2010/main" Requires="a14">
+      <mc:AlternateContent xmlns:mc="http://schemas.openxmlformats.org/markup-compatibility/2006" xmlns:a14="http://schemas.microsoft.com/office/drawing/2010/main">
+        <mc:Choice Requires="a14">
           <p:sp>
             <p:nvSpPr>
               <p:cNvPr id="3" name="Content Placeholder 2">
@@ -9034,7 +9034,7 @@
             </p:txBody>
           </p:sp>
         </mc:Choice>
-        <mc:Fallback>
+        <mc:Fallback xmlns="">
           <p:sp>
             <p:nvSpPr>
               <p:cNvPr id="3" name="Content Placeholder 2">
@@ -9547,8 +9547,8 @@
           </a:p>
         </p:txBody>
       </p:sp>
-      <mc:AlternateContent xmlns:mc="http://schemas.openxmlformats.org/markup-compatibility/2006">
-        <mc:Choice xmlns:a14="http://schemas.microsoft.com/office/drawing/2010/main" Requires="a14">
+      <mc:AlternateContent xmlns:mc="http://schemas.openxmlformats.org/markup-compatibility/2006" xmlns:a14="http://schemas.microsoft.com/office/drawing/2010/main">
+        <mc:Choice Requires="a14">
           <p:sp>
             <p:nvSpPr>
               <p:cNvPr id="3" name="Content Placeholder 2">
@@ -9824,7 +9824,7 @@
             </p:txBody>
           </p:sp>
         </mc:Choice>
-        <mc:Fallback>
+        <mc:Fallback xmlns="">
           <p:sp>
             <p:nvSpPr>
               <p:cNvPr id="3" name="Content Placeholder 2">
@@ -10221,8 +10221,8 @@
           </a:p>
         </p:txBody>
       </p:sp>
-      <mc:AlternateContent xmlns:mc="http://schemas.openxmlformats.org/markup-compatibility/2006">
-        <mc:Choice xmlns:a14="http://schemas.microsoft.com/office/drawing/2010/main" Requires="a14">
+      <mc:AlternateContent xmlns:mc="http://schemas.openxmlformats.org/markup-compatibility/2006" xmlns:a14="http://schemas.microsoft.com/office/drawing/2010/main">
+        <mc:Choice Requires="a14">
           <p:sp>
             <p:nvSpPr>
               <p:cNvPr id="3" name="Content Placeholder 2">
@@ -10601,18 +10601,13 @@
                 </a:pPr>
                 <a:r>
                   <a:rPr lang="en-GB" dirty="0"/>
-                  <a:t>Note that it still has an optimal solution at </a:t>
+                  <a:t>Note that it still has an optimal solution at a vertex!</a:t>
                 </a:r>
-                <a:r>
-                  <a:rPr lang="en-GB"/>
-                  <a:t>a vertex!</a:t>
-                </a:r>
-                <a:endParaRPr lang="en-GB" dirty="0"/>
               </a:p>
             </p:txBody>
           </p:sp>
         </mc:Choice>
-        <mc:Fallback>
+        <mc:Fallback xmlns="">
           <p:sp>
             <p:nvSpPr>
               <p:cNvPr id="3" name="Content Placeholder 2">
@@ -12050,8 +12045,8 @@
           </a:p>
         </p:txBody>
       </p:sp>
-      <mc:AlternateContent xmlns:mc="http://schemas.openxmlformats.org/markup-compatibility/2006">
-        <mc:Choice xmlns:a14="http://schemas.microsoft.com/office/drawing/2010/main" Requires="a14">
+      <mc:AlternateContent xmlns:mc="http://schemas.openxmlformats.org/markup-compatibility/2006" xmlns:a14="http://schemas.microsoft.com/office/drawing/2010/main">
+        <mc:Choice Requires="a14">
           <p:sp>
             <p:nvSpPr>
               <p:cNvPr id="3" name="Content Placeholder 2">
@@ -12396,7 +12391,7 @@
             </p:txBody>
           </p:sp>
         </mc:Choice>
-        <mc:Fallback>
+        <mc:Fallback xmlns="">
           <p:sp>
             <p:nvSpPr>
               <p:cNvPr id="3" name="Content Placeholder 2">
@@ -13150,8 +13145,8 @@
           </a:p>
         </p:txBody>
       </p:sp>
-      <mc:AlternateContent xmlns:mc="http://schemas.openxmlformats.org/markup-compatibility/2006">
-        <mc:Choice xmlns:a14="http://schemas.microsoft.com/office/drawing/2010/main" Requires="a14">
+      <mc:AlternateContent xmlns:mc="http://schemas.openxmlformats.org/markup-compatibility/2006" xmlns:a14="http://schemas.microsoft.com/office/drawing/2010/main">
+        <mc:Choice Requires="a14">
           <p:sp>
             <p:nvSpPr>
               <p:cNvPr id="3" name="Content Placeholder 2">
@@ -13420,7 +13415,7 @@
             </p:txBody>
           </p:sp>
         </mc:Choice>
-        <mc:Fallback>
+        <mc:Fallback xmlns="">
           <p:sp>
             <p:nvSpPr>
               <p:cNvPr id="3" name="Content Placeholder 2">
@@ -18847,8 +18842,8 @@
           </a:p>
         </p:txBody>
       </p:sp>
-      <mc:AlternateContent xmlns:mc="http://schemas.openxmlformats.org/markup-compatibility/2006">
-        <mc:Choice xmlns:a14="http://schemas.microsoft.com/office/drawing/2010/main" Requires="a14">
+      <mc:AlternateContent xmlns:mc="http://schemas.openxmlformats.org/markup-compatibility/2006" xmlns:a14="http://schemas.microsoft.com/office/drawing/2010/main">
+        <mc:Choice Requires="a14">
           <p:sp>
             <p:nvSpPr>
               <p:cNvPr id="3" name="Content Placeholder 2">
@@ -19164,7 +19159,7 @@
             </p:txBody>
           </p:sp>
         </mc:Choice>
-        <mc:Fallback>
+        <mc:Fallback xmlns="">
           <p:sp>
             <p:nvSpPr>
               <p:cNvPr id="3" name="Content Placeholder 2">
@@ -21388,8 +21383,8 @@
           </a:p>
         </p:txBody>
       </p:sp>
-      <mc:AlternateContent xmlns:mc="http://schemas.openxmlformats.org/markup-compatibility/2006">
-        <mc:Choice xmlns:a14="http://schemas.microsoft.com/office/drawing/2010/main" Requires="a14">
+      <mc:AlternateContent xmlns:mc="http://schemas.openxmlformats.org/markup-compatibility/2006" xmlns:a14="http://schemas.microsoft.com/office/drawing/2010/main">
+        <mc:Choice Requires="a14">
           <p:sp>
             <p:nvSpPr>
               <p:cNvPr id="3" name="Content Placeholder 2">
@@ -21572,7 +21567,7 @@
             </p:txBody>
           </p:sp>
         </mc:Choice>
-        <mc:Fallback>
+        <mc:Fallback xmlns="">
           <p:sp>
             <p:nvSpPr>
               <p:cNvPr id="3" name="Content Placeholder 2">
@@ -22232,8 +22227,8 @@
           </a:p>
         </p:txBody>
       </p:sp>
-      <mc:AlternateContent xmlns:mc="http://schemas.openxmlformats.org/markup-compatibility/2006">
-        <mc:Choice xmlns:a14="http://schemas.microsoft.com/office/drawing/2010/main" Requires="a14">
+      <mc:AlternateContent xmlns:mc="http://schemas.openxmlformats.org/markup-compatibility/2006" xmlns:a14="http://schemas.microsoft.com/office/drawing/2010/main">
+        <mc:Choice Requires="a14">
           <p:sp>
             <p:nvSpPr>
               <p:cNvPr id="7" name="Rectangle 6">
@@ -22423,7 +22418,7 @@
             </p:txBody>
           </p:sp>
         </mc:Choice>
-        <mc:Fallback>
+        <mc:Fallback xmlns="">
           <p:sp>
             <p:nvSpPr>
               <p:cNvPr id="7" name="Rectangle 6">
@@ -22568,8 +22563,8 @@
           </a:p>
         </p:txBody>
       </p:sp>
-      <mc:AlternateContent xmlns:mc="http://schemas.openxmlformats.org/markup-compatibility/2006">
-        <mc:Choice xmlns:a14="http://schemas.microsoft.com/office/drawing/2010/main" Requires="a14">
+      <mc:AlternateContent xmlns:mc="http://schemas.openxmlformats.org/markup-compatibility/2006" xmlns:a14="http://schemas.microsoft.com/office/drawing/2010/main">
+        <mc:Choice Requires="a14">
           <p:sp>
             <p:nvSpPr>
               <p:cNvPr id="10" name="TextBox 9">
@@ -22604,6 +22599,7 @@
                 </a:r>
               </a:p>
               <a:p>
+                <a:pPr/>
                 <a14:m>
                   <m:oMathPara xmlns:m="http://schemas.openxmlformats.org/officeDocument/2006/math">
                     <m:oMathParaPr>
@@ -22680,7 +22676,7 @@
             </p:txBody>
           </p:sp>
         </mc:Choice>
-        <mc:Fallback>
+        <mc:Fallback xmlns="">
           <p:sp>
             <p:nvSpPr>
               <p:cNvPr id="10" name="TextBox 9">
@@ -24357,8 +24353,8 @@
           </a:p>
         </p:txBody>
       </p:sp>
-      <mc:AlternateContent xmlns:mc="http://schemas.openxmlformats.org/markup-compatibility/2006">
-        <mc:Choice xmlns:a14="http://schemas.microsoft.com/office/drawing/2010/main" Requires="a14">
+      <mc:AlternateContent xmlns:mc="http://schemas.openxmlformats.org/markup-compatibility/2006" xmlns:a14="http://schemas.microsoft.com/office/drawing/2010/main">
+        <mc:Choice Requires="a14">
           <p:sp>
             <p:nvSpPr>
               <p:cNvPr id="4" name="TextBox 3">
@@ -24895,7 +24891,7 @@
             </p:txBody>
           </p:sp>
         </mc:Choice>
-        <mc:Fallback>
+        <mc:Fallback xmlns="">
           <p:sp>
             <p:nvSpPr>
               <p:cNvPr id="4" name="TextBox 3">
@@ -26841,18 +26837,18 @@
 </file>
 
 <file path=customXml/item2.xml><?xml version="1.0" encoding="utf-8"?>
+<p:properties xmlns:p="http://schemas.microsoft.com/office/2006/metadata/properties" xmlns:xsi="http://www.w3.org/2001/XMLSchema-instance" xmlns:pc="http://schemas.microsoft.com/office/infopath/2007/PartnerControls">
+  <documentManagement/>
+</p:properties>
+</file>
+
+<file path=customXml/item3.xml><?xml version="1.0" encoding="utf-8"?>
 <?mso-contentType ?>
 <FormTemplates xmlns="http://schemas.microsoft.com/sharepoint/v3/contenttype/forms">
   <Display>DocumentLibraryForm</Display>
   <Edit>DocumentLibraryForm</Edit>
   <New>DocumentLibraryForm</New>
 </FormTemplates>
-</file>
-
-<file path=customXml/item3.xml><?xml version="1.0" encoding="utf-8"?>
-<p:properties xmlns:p="http://schemas.microsoft.com/office/2006/metadata/properties" xmlns:xsi="http://www.w3.org/2001/XMLSchema-instance" xmlns:pc="http://schemas.microsoft.com/office/infopath/2007/PartnerControls">
-  <documentManagement/>
-</p:properties>
 </file>
 
 <file path=customXml/itemProps1.xml><?xml version="1.0" encoding="utf-8"?>
@@ -26875,14 +26871,6 @@
 </file>
 
 <file path=customXml/itemProps2.xml><?xml version="1.0" encoding="utf-8"?>
-<ds:datastoreItem xmlns:ds="http://schemas.openxmlformats.org/officeDocument/2006/customXml" ds:itemID="{E49AC1EE-B6B3-4625-9CB8-D61F060C41FF}">
-  <ds:schemaRefs>
-    <ds:schemaRef ds:uri="http://schemas.microsoft.com/sharepoint/v3/contenttype/forms"/>
-  </ds:schemaRefs>
-</ds:datastoreItem>
-</file>
-
-<file path=customXml/itemProps3.xml><?xml version="1.0" encoding="utf-8"?>
 <ds:datastoreItem xmlns:ds="http://schemas.openxmlformats.org/officeDocument/2006/customXml" ds:itemID="{3B587AB4-D8C9-43A3-B80F-6729B49465FB}">
   <ds:schemaRefs>
     <ds:schemaRef ds:uri="http://purl.org/dc/elements/1.1/"/>
@@ -26897,4 +26885,12 @@
     <ds:schemaRef ds:uri="http://purl.org/dc/dcmitype/"/>
   </ds:schemaRefs>
 </ds:datastoreItem>
+</file>
+
+<file path=customXml/itemProps3.xml><?xml version="1.0" encoding="utf-8"?>
+<ds:datastoreItem xmlns:ds="http://schemas.openxmlformats.org/officeDocument/2006/customXml" ds:itemID="{E49AC1EE-B6B3-4625-9CB8-D61F060C41FF}">
+  <ds:schemaRefs>
+    <ds:schemaRef ds:uri="http://schemas.microsoft.com/sharepoint/v3/contenttype/forms"/>
+  </ds:schemaRefs>
+</ds:datastoreItem>
 </file>